--- a/넌_착해!_-_통합_기획서_(Pixel_Art_Edition).pptx
+++ b/넌_착해!_-_통합_기획서_(Pixel_Art_Edition).pptx
@@ -154,7 +154,7 @@
   <pc:docChgLst>
     <pc:chgData name="musukie52@gmail.com" userId="017bd91f96aa8751" providerId="LiveId" clId="{5B2C3894-F97E-4CAB-8812-5BB4D83AAC6A}"/>
     <pc:docChg chg="undo custSel addSld delSld modSld">
-      <pc:chgData name="musukie52@gmail.com" userId="017bd91f96aa8751" providerId="LiveId" clId="{5B2C3894-F97E-4CAB-8812-5BB4D83AAC6A}" dt="2026-02-07T06:25:50.377" v="161" actId="1076"/>
+      <pc:chgData name="musukie52@gmail.com" userId="017bd91f96aa8751" providerId="LiveId" clId="{5B2C3894-F97E-4CAB-8812-5BB4D83AAC6A}" dt="2026-02-10T00:42:00.851" v="162" actId="20577"/>
       <pc:docMkLst>
         <pc:docMk/>
       </pc:docMkLst>
@@ -164,14 +164,6 @@
           <pc:docMk/>
           <pc:sldMk cId="0" sldId="259"/>
         </pc:sldMkLst>
-        <pc:picChg chg="add del mod">
-          <ac:chgData name="musukie52@gmail.com" userId="017bd91f96aa8751" providerId="LiveId" clId="{5B2C3894-F97E-4CAB-8812-5BB4D83AAC6A}" dt="2026-02-07T06:15:10.549" v="64" actId="478"/>
-          <ac:picMkLst>
-            <pc:docMk/>
-            <pc:sldMk cId="0" sldId="259"/>
-            <ac:picMk id="21" creationId="{BE06EEFB-59E3-3ABF-5610-F17DE044D040}"/>
-          </ac:picMkLst>
-        </pc:picChg>
       </pc:sldChg>
       <pc:sldChg chg="addSp modSp mod">
         <pc:chgData name="musukie52@gmail.com" userId="017bd91f96aa8751" providerId="LiveId" clId="{5B2C3894-F97E-4CAB-8812-5BB4D83AAC6A}" dt="2026-02-07T06:11:19.925" v="1" actId="1076"/>
@@ -194,45 +186,21 @@
           <pc:docMk/>
           <pc:sldMk cId="0" sldId="264"/>
         </pc:sldMkLst>
-        <pc:picChg chg="add mod">
-          <ac:chgData name="musukie52@gmail.com" userId="017bd91f96aa8751" providerId="LiveId" clId="{5B2C3894-F97E-4CAB-8812-5BB4D83AAC6A}" dt="2026-02-07T06:16:09.025" v="71"/>
-          <ac:picMkLst>
-            <pc:docMk/>
-            <pc:sldMk cId="0" sldId="264"/>
-            <ac:picMk id="25" creationId="{A34C5754-F673-36DE-04EE-2CD436F5B392}"/>
-          </ac:picMkLst>
-        </pc:picChg>
-        <pc:picChg chg="add mod">
-          <ac:chgData name="musukie52@gmail.com" userId="017bd91f96aa8751" providerId="LiveId" clId="{5B2C3894-F97E-4CAB-8812-5BB4D83AAC6A}" dt="2026-02-07T06:16:09.025" v="71"/>
-          <ac:picMkLst>
-            <pc:docMk/>
-            <pc:sldMk cId="0" sldId="264"/>
-            <ac:picMk id="26" creationId="{04055ED0-12B7-4BAE-3D99-5218E437E0A8}"/>
-          </ac:picMkLst>
-        </pc:picChg>
-        <pc:picChg chg="add mod">
-          <ac:chgData name="musukie52@gmail.com" userId="017bd91f96aa8751" providerId="LiveId" clId="{5B2C3894-F97E-4CAB-8812-5BB4D83AAC6A}" dt="2026-02-07T06:16:09.025" v="71"/>
-          <ac:picMkLst>
-            <pc:docMk/>
-            <pc:sldMk cId="0" sldId="264"/>
-            <ac:picMk id="27" creationId="{FEC7C8A0-5915-0B58-3014-E2FFFC8E2E6D}"/>
-          </ac:picMkLst>
-        </pc:picChg>
-        <pc:picChg chg="add mod">
-          <ac:chgData name="musukie52@gmail.com" userId="017bd91f96aa8751" providerId="LiveId" clId="{5B2C3894-F97E-4CAB-8812-5BB4D83AAC6A}" dt="2026-02-07T06:16:09.025" v="71"/>
-          <ac:picMkLst>
-            <pc:docMk/>
-            <pc:sldMk cId="0" sldId="264"/>
-            <ac:picMk id="28" creationId="{75C32BA1-B0AE-B88E-9E67-CEBF161C7A10}"/>
-          </ac:picMkLst>
-        </pc:picChg>
       </pc:sldChg>
       <pc:sldChg chg="modSp mod">
-        <pc:chgData name="musukie52@gmail.com" userId="017bd91f96aa8751" providerId="LiveId" clId="{5B2C3894-F97E-4CAB-8812-5BB4D83AAC6A}" dt="2026-02-07T06:17:48.453" v="93" actId="20577"/>
+        <pc:chgData name="musukie52@gmail.com" userId="017bd91f96aa8751" providerId="LiveId" clId="{5B2C3894-F97E-4CAB-8812-5BB4D83AAC6A}" dt="2026-02-10T00:42:00.851" v="162" actId="20577"/>
         <pc:sldMkLst>
           <pc:docMk/>
           <pc:sldMk cId="0" sldId="267"/>
         </pc:sldMkLst>
+        <pc:spChg chg="mod">
+          <ac:chgData name="musukie52@gmail.com" userId="017bd91f96aa8751" providerId="LiveId" clId="{5B2C3894-F97E-4CAB-8812-5BB4D83AAC6A}" dt="2026-02-10T00:42:00.851" v="162" actId="20577"/>
+          <ac:spMkLst>
+            <pc:docMk/>
+            <pc:sldMk cId="0" sldId="267"/>
+            <ac:spMk id="6" creationId="{00000000-0000-0000-0000-000000000000}"/>
+          </ac:spMkLst>
+        </pc:spChg>
         <pc:spChg chg="mod">
           <ac:chgData name="musukie52@gmail.com" userId="017bd91f96aa8751" providerId="LiveId" clId="{5B2C3894-F97E-4CAB-8812-5BB4D83AAC6A}" dt="2026-02-07T06:17:48.453" v="93" actId="20577"/>
           <ac:spMkLst>
@@ -248,38 +216,6 @@
           <pc:docMk/>
           <pc:sldMk cId="0" sldId="269"/>
         </pc:sldMkLst>
-        <pc:picChg chg="add mod">
-          <ac:chgData name="musukie52@gmail.com" userId="017bd91f96aa8751" providerId="LiveId" clId="{5B2C3894-F97E-4CAB-8812-5BB4D83AAC6A}" dt="2026-02-07T06:18:50.809" v="102"/>
-          <ac:picMkLst>
-            <pc:docMk/>
-            <pc:sldMk cId="0" sldId="269"/>
-            <ac:picMk id="20" creationId="{5C1898BD-97A8-D3BD-7332-A0A83A2CDCD7}"/>
-          </ac:picMkLst>
-        </pc:picChg>
-        <pc:picChg chg="add mod">
-          <ac:chgData name="musukie52@gmail.com" userId="017bd91f96aa8751" providerId="LiveId" clId="{5B2C3894-F97E-4CAB-8812-5BB4D83AAC6A}" dt="2026-02-07T06:18:50.809" v="102"/>
-          <ac:picMkLst>
-            <pc:docMk/>
-            <pc:sldMk cId="0" sldId="269"/>
-            <ac:picMk id="21" creationId="{78E156C9-BDB9-E168-F203-86FDAD0836FF}"/>
-          </ac:picMkLst>
-        </pc:picChg>
-        <pc:picChg chg="add mod">
-          <ac:chgData name="musukie52@gmail.com" userId="017bd91f96aa8751" providerId="LiveId" clId="{5B2C3894-F97E-4CAB-8812-5BB4D83AAC6A}" dt="2026-02-07T06:18:50.809" v="102"/>
-          <ac:picMkLst>
-            <pc:docMk/>
-            <pc:sldMk cId="0" sldId="269"/>
-            <ac:picMk id="22" creationId="{F8DA2462-A009-9810-501B-37F8DE26C20A}"/>
-          </ac:picMkLst>
-        </pc:picChg>
-        <pc:picChg chg="add mod">
-          <ac:chgData name="musukie52@gmail.com" userId="017bd91f96aa8751" providerId="LiveId" clId="{5B2C3894-F97E-4CAB-8812-5BB4D83AAC6A}" dt="2026-02-07T06:18:50.809" v="102"/>
-          <ac:picMkLst>
-            <pc:docMk/>
-            <pc:sldMk cId="0" sldId="269"/>
-            <ac:picMk id="23" creationId="{4B99E065-B7E2-06EA-772D-1CD55DED9AF2}"/>
-          </ac:picMkLst>
-        </pc:picChg>
       </pc:sldChg>
       <pc:sldChg chg="addSp modSp">
         <pc:chgData name="musukie52@gmail.com" userId="017bd91f96aa8751" providerId="LiveId" clId="{5B2C3894-F97E-4CAB-8812-5BB4D83AAC6A}" dt="2026-02-07T06:19:45.615" v="115"/>
@@ -349,14 +285,6 @@
           <pc:docMk/>
           <pc:sldMk cId="0" sldId="279"/>
         </pc:sldMkLst>
-        <pc:picChg chg="add mod">
-          <ac:chgData name="musukie52@gmail.com" userId="017bd91f96aa8751" providerId="LiveId" clId="{5B2C3894-F97E-4CAB-8812-5BB4D83AAC6A}" dt="2026-02-07T06:24:56.036" v="153"/>
-          <ac:picMkLst>
-            <pc:docMk/>
-            <pc:sldMk cId="0" sldId="279"/>
-            <ac:picMk id="26" creationId="{78D329CA-0DD4-19A1-C58E-DB2E16CF1FCE}"/>
-          </ac:picMkLst>
-        </pc:picChg>
       </pc:sldChg>
       <pc:sldChg chg="setBg">
         <pc:chgData name="musukie52@gmail.com" userId="017bd91f96aa8751" providerId="LiveId" clId="{5B2C3894-F97E-4CAB-8812-5BB4D83AAC6A}" dt="2026-02-07T06:12:17.142" v="5"/>
@@ -371,94 +299,6 @@
           <pc:docMk/>
           <pc:sldMk cId="1249678768" sldId="284"/>
         </pc:sldMkLst>
-        <pc:picChg chg="add del mod">
-          <ac:chgData name="musukie52@gmail.com" userId="017bd91f96aa8751" providerId="LiveId" clId="{5B2C3894-F97E-4CAB-8812-5BB4D83AAC6A}" dt="2026-02-07T06:12:36.508" v="8" actId="21"/>
-          <ac:picMkLst>
-            <pc:docMk/>
-            <pc:sldMk cId="1249678768" sldId="284"/>
-            <ac:picMk id="2" creationId="{745DA7BA-4ED1-A609-7B80-765508266FBE}"/>
-          </ac:picMkLst>
-        </pc:picChg>
-        <pc:picChg chg="add del mod">
-          <ac:chgData name="musukie52@gmail.com" userId="017bd91f96aa8751" providerId="LiveId" clId="{5B2C3894-F97E-4CAB-8812-5BB4D83AAC6A}" dt="2026-02-07T06:12:36.508" v="8" actId="21"/>
-          <ac:picMkLst>
-            <pc:docMk/>
-            <pc:sldMk cId="1249678768" sldId="284"/>
-            <ac:picMk id="3" creationId="{71422ADB-4910-87C4-FB36-83E33E71BCAE}"/>
-          </ac:picMkLst>
-        </pc:picChg>
-        <pc:picChg chg="add del">
-          <ac:chgData name="musukie52@gmail.com" userId="017bd91f96aa8751" providerId="LiveId" clId="{5B2C3894-F97E-4CAB-8812-5BB4D83AAC6A}" dt="2026-02-07T06:13:09.721" v="27" actId="21"/>
-          <ac:picMkLst>
-            <pc:docMk/>
-            <pc:sldMk cId="1249678768" sldId="284"/>
-            <ac:picMk id="4" creationId="{33E3461F-147F-12FF-8D4D-ACE96A034D2E}"/>
-          </ac:picMkLst>
-        </pc:picChg>
-        <pc:picChg chg="add del mod">
-          <ac:chgData name="musukie52@gmail.com" userId="017bd91f96aa8751" providerId="LiveId" clId="{5B2C3894-F97E-4CAB-8812-5BB4D83AAC6A}" dt="2026-02-07T06:12:36.508" v="8" actId="21"/>
-          <ac:picMkLst>
-            <pc:docMk/>
-            <pc:sldMk cId="1249678768" sldId="284"/>
-            <ac:picMk id="5" creationId="{3BCEEC3C-5172-8F5A-4909-D90A515575D6}"/>
-          </ac:picMkLst>
-        </pc:picChg>
-        <pc:picChg chg="add del mod">
-          <ac:chgData name="musukie52@gmail.com" userId="017bd91f96aa8751" providerId="LiveId" clId="{5B2C3894-F97E-4CAB-8812-5BB4D83AAC6A}" dt="2026-02-07T06:12:36.508" v="8" actId="21"/>
-          <ac:picMkLst>
-            <pc:docMk/>
-            <pc:sldMk cId="1249678768" sldId="284"/>
-            <ac:picMk id="6" creationId="{3A649E88-A1EC-F48E-2256-B92C552B1021}"/>
-          </ac:picMkLst>
-        </pc:picChg>
-        <pc:picChg chg="add del mod">
-          <ac:chgData name="musukie52@gmail.com" userId="017bd91f96aa8751" providerId="LiveId" clId="{5B2C3894-F97E-4CAB-8812-5BB4D83AAC6A}" dt="2026-02-07T06:12:36.508" v="8" actId="21"/>
-          <ac:picMkLst>
-            <pc:docMk/>
-            <pc:sldMk cId="1249678768" sldId="284"/>
-            <ac:picMk id="7" creationId="{A71D9063-58DC-CF4D-AC7C-14E750320A2A}"/>
-          </ac:picMkLst>
-        </pc:picChg>
-        <pc:picChg chg="del">
-          <ac:chgData name="musukie52@gmail.com" userId="017bd91f96aa8751" providerId="LiveId" clId="{5B2C3894-F97E-4CAB-8812-5BB4D83AAC6A}" dt="2026-02-07T06:12:36.508" v="8" actId="21"/>
-          <ac:picMkLst>
-            <pc:docMk/>
-            <pc:sldMk cId="1249678768" sldId="284"/>
-            <ac:picMk id="8" creationId="{142314BB-CE1D-BD5B-F99E-3EF659148DBD}"/>
-          </ac:picMkLst>
-        </pc:picChg>
-        <pc:picChg chg="del">
-          <ac:chgData name="musukie52@gmail.com" userId="017bd91f96aa8751" providerId="LiveId" clId="{5B2C3894-F97E-4CAB-8812-5BB4D83AAC6A}" dt="2026-02-07T06:12:36.508" v="8" actId="21"/>
-          <ac:picMkLst>
-            <pc:docMk/>
-            <pc:sldMk cId="1249678768" sldId="284"/>
-            <ac:picMk id="9" creationId="{4DE77B15-1DE4-2DB3-3918-FE67201F9453}"/>
-          </ac:picMkLst>
-        </pc:picChg>
-        <pc:picChg chg="add del mod">
-          <ac:chgData name="musukie52@gmail.com" userId="017bd91f96aa8751" providerId="LiveId" clId="{5B2C3894-F97E-4CAB-8812-5BB4D83AAC6A}" dt="2026-02-07T06:12:36.508" v="8" actId="21"/>
-          <ac:picMkLst>
-            <pc:docMk/>
-            <pc:sldMk cId="1249678768" sldId="284"/>
-            <ac:picMk id="10" creationId="{8CF8A212-E19A-CB9A-3DEA-2C2C4D537FA4}"/>
-          </ac:picMkLst>
-        </pc:picChg>
-        <pc:picChg chg="add del mod">
-          <ac:chgData name="musukie52@gmail.com" userId="017bd91f96aa8751" providerId="LiveId" clId="{5B2C3894-F97E-4CAB-8812-5BB4D83AAC6A}" dt="2026-02-07T06:12:36.508" v="8" actId="21"/>
-          <ac:picMkLst>
-            <pc:docMk/>
-            <pc:sldMk cId="1249678768" sldId="284"/>
-            <ac:picMk id="11" creationId="{DC5C6E32-7F74-4256-4CBA-434430C3C05F}"/>
-          </ac:picMkLst>
-        </pc:picChg>
-        <pc:picChg chg="add del mod">
-          <ac:chgData name="musukie52@gmail.com" userId="017bd91f96aa8751" providerId="LiveId" clId="{5B2C3894-F97E-4CAB-8812-5BB4D83AAC6A}" dt="2026-02-07T06:12:36.508" v="8" actId="21"/>
-          <ac:picMkLst>
-            <pc:docMk/>
-            <pc:sldMk cId="1249678768" sldId="284"/>
-            <ac:picMk id="12" creationId="{99C95927-10F6-FC88-43B6-7E42906A701D}"/>
-          </ac:picMkLst>
-        </pc:picChg>
         <pc:picChg chg="mod">
           <ac:chgData name="musukie52@gmail.com" userId="017bd91f96aa8751" providerId="LiveId" clId="{5B2C3894-F97E-4CAB-8812-5BB4D83AAC6A}" dt="2026-02-07T06:13:24.131" v="35" actId="1076"/>
           <ac:picMkLst>
@@ -507,60 +347,12 @@
             <ac:picMk id="18" creationId="{3A915CCF-910B-4D31-BB1A-B728A178B8A4}"/>
           </ac:picMkLst>
         </pc:picChg>
-        <pc:picChg chg="add del mod">
-          <ac:chgData name="musukie52@gmail.com" userId="017bd91f96aa8751" providerId="LiveId" clId="{5B2C3894-F97E-4CAB-8812-5BB4D83AAC6A}" dt="2026-02-07T06:13:09.721" v="27" actId="21"/>
-          <ac:picMkLst>
-            <pc:docMk/>
-            <pc:sldMk cId="1249678768" sldId="284"/>
-            <ac:picMk id="19" creationId="{EE6B1F65-E4DD-EDE0-98B3-DDA5FAEA7B34}"/>
-          </ac:picMkLst>
-        </pc:picChg>
         <pc:picChg chg="add mod">
           <ac:chgData name="musukie52@gmail.com" userId="017bd91f96aa8751" providerId="LiveId" clId="{5B2C3894-F97E-4CAB-8812-5BB4D83AAC6A}" dt="2026-02-07T06:14:14.993" v="52" actId="1076"/>
           <ac:picMkLst>
             <pc:docMk/>
             <pc:sldMk cId="1249678768" sldId="284"/>
             <ac:picMk id="20" creationId="{C1EABD7E-6631-9496-E26E-4F88AC73C920}"/>
-          </ac:picMkLst>
-        </pc:picChg>
-        <pc:picChg chg="add del mod">
-          <ac:chgData name="musukie52@gmail.com" userId="017bd91f96aa8751" providerId="LiveId" clId="{5B2C3894-F97E-4CAB-8812-5BB4D83AAC6A}" dt="2026-02-07T06:14:42.702" v="56" actId="21"/>
-          <ac:picMkLst>
-            <pc:docMk/>
-            <pc:sldMk cId="1249678768" sldId="284"/>
-            <ac:picMk id="21" creationId="{4D9CDC84-F072-DD6A-D55A-DB1395828042}"/>
-          </ac:picMkLst>
-        </pc:picChg>
-        <pc:picChg chg="add del mod">
-          <ac:chgData name="musukie52@gmail.com" userId="017bd91f96aa8751" providerId="LiveId" clId="{5B2C3894-F97E-4CAB-8812-5BB4D83AAC6A}" dt="2026-02-07T06:14:42.702" v="56" actId="21"/>
-          <ac:picMkLst>
-            <pc:docMk/>
-            <pc:sldMk cId="1249678768" sldId="284"/>
-            <ac:picMk id="22" creationId="{FAAFFF15-B7DF-0BF8-51AB-A038C4FD5D3E}"/>
-          </ac:picMkLst>
-        </pc:picChg>
-        <pc:picChg chg="add del mod">
-          <ac:chgData name="musukie52@gmail.com" userId="017bd91f96aa8751" providerId="LiveId" clId="{5B2C3894-F97E-4CAB-8812-5BB4D83AAC6A}" dt="2026-02-07T06:14:42.702" v="56" actId="21"/>
-          <ac:picMkLst>
-            <pc:docMk/>
-            <pc:sldMk cId="1249678768" sldId="284"/>
-            <ac:picMk id="23" creationId="{D9E74EBD-289C-4EAE-E787-2AAD0785F36E}"/>
-          </ac:picMkLst>
-        </pc:picChg>
-        <pc:picChg chg="add del mod">
-          <ac:chgData name="musukie52@gmail.com" userId="017bd91f96aa8751" providerId="LiveId" clId="{5B2C3894-F97E-4CAB-8812-5BB4D83AAC6A}" dt="2026-02-07T06:14:42.702" v="56" actId="21"/>
-          <ac:picMkLst>
-            <pc:docMk/>
-            <pc:sldMk cId="1249678768" sldId="284"/>
-            <ac:picMk id="24" creationId="{25356BEB-C27B-7557-39B0-E2E51AF580B6}"/>
-          </ac:picMkLst>
-        </pc:picChg>
-        <pc:picChg chg="add del mod">
-          <ac:chgData name="musukie52@gmail.com" userId="017bd91f96aa8751" providerId="LiveId" clId="{5B2C3894-F97E-4CAB-8812-5BB4D83AAC6A}" dt="2026-02-07T06:14:42.702" v="56" actId="21"/>
-          <ac:picMkLst>
-            <pc:docMk/>
-            <pc:sldMk cId="1249678768" sldId="284"/>
-            <ac:picMk id="25" creationId="{CF2A89C5-2162-FAF7-3BAD-9221AB1ADFF5}"/>
           </ac:picMkLst>
         </pc:picChg>
         <pc:picChg chg="add mod">
@@ -611,36 +403,12 @@
             <ac:picMk id="31" creationId="{E0321539-1D61-8851-76A9-FC5104A6D2E1}"/>
           </ac:picMkLst>
         </pc:picChg>
-        <pc:picChg chg="add del mod">
-          <ac:chgData name="musukie52@gmail.com" userId="017bd91f96aa8751" providerId="LiveId" clId="{5B2C3894-F97E-4CAB-8812-5BB4D83AAC6A}" dt="2026-02-07T06:17:20.929" v="90" actId="478"/>
-          <ac:picMkLst>
-            <pc:docMk/>
-            <pc:sldMk cId="1249678768" sldId="284"/>
-            <ac:picMk id="32" creationId="{8549F3B1-430F-D733-70ED-888176ACB72B}"/>
-          </ac:picMkLst>
-        </pc:picChg>
-        <pc:picChg chg="add del mod">
-          <ac:chgData name="musukie52@gmail.com" userId="017bd91f96aa8751" providerId="LiveId" clId="{5B2C3894-F97E-4CAB-8812-5BB4D83AAC6A}" dt="2026-02-07T06:18:19.313" v="96" actId="478"/>
-          <ac:picMkLst>
-            <pc:docMk/>
-            <pc:sldMk cId="1249678768" sldId="284"/>
-            <ac:picMk id="33" creationId="{46FEB3BF-9D81-FA8E-522A-D0A7A0FB60ED}"/>
-          </ac:picMkLst>
-        </pc:picChg>
         <pc:picChg chg="add mod">
           <ac:chgData name="musukie52@gmail.com" userId="017bd91f96aa8751" providerId="LiveId" clId="{5B2C3894-F97E-4CAB-8812-5BB4D83AAC6A}" dt="2026-02-07T06:18:21.503" v="97" actId="1076"/>
           <ac:picMkLst>
             <pc:docMk/>
             <pc:sldMk cId="1249678768" sldId="284"/>
             <ac:picMk id="34" creationId="{AFCA0A42-5645-FE57-C8C4-2AFD5D7F2B25}"/>
-          </ac:picMkLst>
-        </pc:picChg>
-        <pc:picChg chg="add del mod">
-          <ac:chgData name="musukie52@gmail.com" userId="017bd91f96aa8751" providerId="LiveId" clId="{5B2C3894-F97E-4CAB-8812-5BB4D83AAC6A}" dt="2026-02-07T06:19:17.674" v="112" actId="21"/>
-          <ac:picMkLst>
-            <pc:docMk/>
-            <pc:sldMk cId="1249678768" sldId="284"/>
-            <ac:picMk id="35" creationId="{A4E2C417-754E-61B1-C0F8-A700B71EE6F4}"/>
           </ac:picMkLst>
         </pc:picChg>
         <pc:picChg chg="add mod">
@@ -747,14 +515,6 @@
             <ac:picMk id="48" creationId="{834FB8B0-5C1B-CB84-EFB6-4A2B2DD9A0DB}"/>
           </ac:picMkLst>
         </pc:picChg>
-        <pc:picChg chg="add del mod">
-          <ac:chgData name="musukie52@gmail.com" userId="017bd91f96aa8751" providerId="LiveId" clId="{5B2C3894-F97E-4CAB-8812-5BB4D83AAC6A}" dt="2026-02-07T06:20:25.466" v="127" actId="478"/>
-          <ac:picMkLst>
-            <pc:docMk/>
-            <pc:sldMk cId="1249678768" sldId="284"/>
-            <ac:picMk id="49" creationId="{D8214A16-E470-39E5-5913-6A72A91B5331}"/>
-          </ac:picMkLst>
-        </pc:picChg>
         <pc:picChg chg="add mod">
           <ac:chgData name="musukie52@gmail.com" userId="017bd91f96aa8751" providerId="LiveId" clId="{5B2C3894-F97E-4CAB-8812-5BB4D83AAC6A}" dt="2026-02-07T06:20:00.439" v="117" actId="14100"/>
           <ac:picMkLst>
@@ -771,28 +531,12 @@
             <ac:picMk id="51" creationId="{3CE5F180-6E30-7B01-DC76-0A7A95651CA7}"/>
           </ac:picMkLst>
         </pc:picChg>
-        <pc:picChg chg="add del mod">
-          <ac:chgData name="musukie52@gmail.com" userId="017bd91f96aa8751" providerId="LiveId" clId="{5B2C3894-F97E-4CAB-8812-5BB4D83AAC6A}" dt="2026-02-07T06:20:04.444" v="118" actId="478"/>
-          <ac:picMkLst>
-            <pc:docMk/>
-            <pc:sldMk cId="1249678768" sldId="284"/>
-            <ac:picMk id="52" creationId="{06540625-B22B-CF98-26DB-997B535C1C35}"/>
-          </ac:picMkLst>
-        </pc:picChg>
         <pc:picChg chg="add mod">
           <ac:chgData name="musukie52@gmail.com" userId="017bd91f96aa8751" providerId="LiveId" clId="{5B2C3894-F97E-4CAB-8812-5BB4D83AAC6A}" dt="2026-02-07T06:20:15.071" v="123" actId="1076"/>
           <ac:picMkLst>
             <pc:docMk/>
             <pc:sldMk cId="1249678768" sldId="284"/>
             <ac:picMk id="53" creationId="{CE8BB2D5-AE68-9FC3-C3F1-70DBC9E0F3FD}"/>
-          </ac:picMkLst>
-        </pc:picChg>
-        <pc:picChg chg="add del mod">
-          <ac:chgData name="musukie52@gmail.com" userId="017bd91f96aa8751" providerId="LiveId" clId="{5B2C3894-F97E-4CAB-8812-5BB4D83AAC6A}" dt="2026-02-07T06:20:58.165" v="132" actId="478"/>
-          <ac:picMkLst>
-            <pc:docMk/>
-            <pc:sldMk cId="1249678768" sldId="284"/>
-            <ac:picMk id="54" creationId="{EB9B93B9-92B2-2E64-62C7-3A26F37DB3FF}"/>
           </ac:picMkLst>
         </pc:picChg>
         <pc:picChg chg="add mod">
@@ -922,36 +666,12 @@
             <ac:picMk id="12" creationId="{99C95927-10F6-FC88-43B6-7E42906A701D}"/>
           </ac:picMkLst>
         </pc:picChg>
-        <pc:picChg chg="add del mod">
-          <ac:chgData name="musukie52@gmail.com" userId="017bd91f96aa8751" providerId="LiveId" clId="{5B2C3894-F97E-4CAB-8812-5BB4D83AAC6A}" dt="2026-02-07T06:14:08.984" v="48" actId="21"/>
-          <ac:picMkLst>
-            <pc:docMk/>
-            <pc:sldMk cId="2637264580" sldId="285"/>
-            <ac:picMk id="13" creationId="{C1EABD7E-6631-9496-E26E-4F88AC73C920}"/>
-          </ac:picMkLst>
-        </pc:picChg>
         <pc:picChg chg="add mod">
           <ac:chgData name="musukie52@gmail.com" userId="017bd91f96aa8751" providerId="LiveId" clId="{5B2C3894-F97E-4CAB-8812-5BB4D83AAC6A}" dt="2026-02-07T06:15:36.701" v="67" actId="1076"/>
           <ac:picMkLst>
             <pc:docMk/>
             <pc:sldMk cId="2637264580" sldId="285"/>
             <ac:picMk id="14" creationId="{87541B22-0796-D855-50FC-1D817E7FFF43}"/>
-          </ac:picMkLst>
-        </pc:picChg>
-        <pc:picChg chg="add del mod">
-          <ac:chgData name="musukie52@gmail.com" userId="017bd91f96aa8751" providerId="LiveId" clId="{5B2C3894-F97E-4CAB-8812-5BB4D83AAC6A}" dt="2026-02-07T06:20:44.685" v="131" actId="478"/>
-          <ac:picMkLst>
-            <pc:docMk/>
-            <pc:sldMk cId="2637264580" sldId="285"/>
-            <ac:picMk id="15" creationId="{AEE7C857-FD8B-15F4-0142-F84DE0CDB90B}"/>
-          </ac:picMkLst>
-        </pc:picChg>
-        <pc:picChg chg="add del mod">
-          <ac:chgData name="musukie52@gmail.com" userId="017bd91f96aa8751" providerId="LiveId" clId="{5B2C3894-F97E-4CAB-8812-5BB4D83AAC6A}" dt="2026-02-07T06:20:43.575" v="130" actId="478"/>
-          <ac:picMkLst>
-            <pc:docMk/>
-            <pc:sldMk cId="2637264580" sldId="285"/>
-            <ac:picMk id="16" creationId="{1E0CE861-E298-3DAC-555A-FF9A0B245128}"/>
           </ac:picMkLst>
         </pc:picChg>
         <pc:picChg chg="add mod">
@@ -968,22 +688,6 @@
             <pc:docMk/>
             <pc:sldMk cId="2637264580" sldId="285"/>
             <ac:picMk id="18" creationId="{C0D8397B-E75A-2DD5-0E7A-5394B828EBF7}"/>
-          </ac:picMkLst>
-        </pc:picChg>
-        <pc:picChg chg="add del mod">
-          <ac:chgData name="musukie52@gmail.com" userId="017bd91f96aa8751" providerId="LiveId" clId="{5B2C3894-F97E-4CAB-8812-5BB4D83AAC6A}" dt="2026-02-07T06:24:21.792" v="147" actId="478"/>
-          <ac:picMkLst>
-            <pc:docMk/>
-            <pc:sldMk cId="2637264580" sldId="285"/>
-            <ac:picMk id="19" creationId="{EE6B1F65-E4DD-EDE0-98B3-DDA5FAEA7B34}"/>
-          </ac:picMkLst>
-        </pc:picChg>
-        <pc:picChg chg="add del mod">
-          <ac:chgData name="musukie52@gmail.com" userId="017bd91f96aa8751" providerId="LiveId" clId="{5B2C3894-F97E-4CAB-8812-5BB4D83AAC6A}" dt="2026-02-07T06:16:22.150" v="73" actId="21"/>
-          <ac:picMkLst>
-            <pc:docMk/>
-            <pc:sldMk cId="2637264580" sldId="285"/>
-            <ac:picMk id="20" creationId="{FBB063F1-7B09-8B8E-BE95-806F7E6B3911}"/>
           </ac:picMkLst>
         </pc:picChg>
         <pc:picChg chg="add mod">
@@ -1026,54 +730,6 @@
             <ac:picMk id="25" creationId="{CF2A89C5-2162-FAF7-3BAD-9221AB1ADFF5}"/>
           </ac:picMkLst>
         </pc:picChg>
-        <pc:picChg chg="add del mod">
-          <ac:chgData name="musukie52@gmail.com" userId="017bd91f96aa8751" providerId="LiveId" clId="{5B2C3894-F97E-4CAB-8812-5BB4D83AAC6A}" dt="2026-02-07T06:16:22.150" v="73" actId="21"/>
-          <ac:picMkLst>
-            <pc:docMk/>
-            <pc:sldMk cId="2637264580" sldId="285"/>
-            <ac:picMk id="26" creationId="{4C466C51-9BBD-03D7-C53E-341C6EAC698B}"/>
-          </ac:picMkLst>
-        </pc:picChg>
-        <pc:picChg chg="add del mod">
-          <ac:chgData name="musukie52@gmail.com" userId="017bd91f96aa8751" providerId="LiveId" clId="{5B2C3894-F97E-4CAB-8812-5BB4D83AAC6A}" dt="2026-02-07T06:16:22.150" v="73" actId="21"/>
-          <ac:picMkLst>
-            <pc:docMk/>
-            <pc:sldMk cId="2637264580" sldId="285"/>
-            <ac:picMk id="27" creationId="{027A3D21-E33E-F95D-DBA6-7581076177D6}"/>
-          </ac:picMkLst>
-        </pc:picChg>
-        <pc:picChg chg="add del mod">
-          <ac:chgData name="musukie52@gmail.com" userId="017bd91f96aa8751" providerId="LiveId" clId="{5B2C3894-F97E-4CAB-8812-5BB4D83AAC6A}" dt="2026-02-07T06:16:22.150" v="73" actId="21"/>
-          <ac:picMkLst>
-            <pc:docMk/>
-            <pc:sldMk cId="2637264580" sldId="285"/>
-            <ac:picMk id="28" creationId="{F7A880BE-EB4B-D176-F6E6-F255021CDBF9}"/>
-          </ac:picMkLst>
-        </pc:picChg>
-        <pc:picChg chg="add del mod">
-          <ac:chgData name="musukie52@gmail.com" userId="017bd91f96aa8751" providerId="LiveId" clId="{5B2C3894-F97E-4CAB-8812-5BB4D83AAC6A}" dt="2026-02-07T06:16:22.150" v="73" actId="21"/>
-          <ac:picMkLst>
-            <pc:docMk/>
-            <pc:sldMk cId="2637264580" sldId="285"/>
-            <ac:picMk id="29" creationId="{8F218C04-3F95-6994-8A11-DFD6BABE8F8E}"/>
-          </ac:picMkLst>
-        </pc:picChg>
-        <pc:picChg chg="add del mod">
-          <ac:chgData name="musukie52@gmail.com" userId="017bd91f96aa8751" providerId="LiveId" clId="{5B2C3894-F97E-4CAB-8812-5BB4D83AAC6A}" dt="2026-02-07T06:17:14.303" v="87" actId="21"/>
-          <ac:picMkLst>
-            <pc:docMk/>
-            <pc:sldMk cId="2637264580" sldId="285"/>
-            <ac:picMk id="30" creationId="{E0321539-1D61-8851-76A9-FC5104A6D2E1}"/>
-          </ac:picMkLst>
-        </pc:picChg>
-        <pc:picChg chg="add del mod">
-          <ac:chgData name="musukie52@gmail.com" userId="017bd91f96aa8751" providerId="LiveId" clId="{5B2C3894-F97E-4CAB-8812-5BB4D83AAC6A}" dt="2026-02-07T06:17:14.303" v="87" actId="21"/>
-          <ac:picMkLst>
-            <pc:docMk/>
-            <pc:sldMk cId="2637264580" sldId="285"/>
-            <ac:picMk id="31" creationId="{8549F3B1-430F-D733-70ED-888176ACB72B}"/>
-          </ac:picMkLst>
-        </pc:picChg>
         <pc:picChg chg="add mod">
           <ac:chgData name="musukie52@gmail.com" userId="017bd91f96aa8751" providerId="LiveId" clId="{5B2C3894-F97E-4CAB-8812-5BB4D83AAC6A}" dt="2026-02-07T06:17:29.762" v="92" actId="1076"/>
           <ac:picMkLst>
@@ -1096,14 +752,6 @@
             <pc:docMk/>
             <pc:sldMk cId="2637264580" sldId="285"/>
             <ac:picMk id="34" creationId="{88DF3B84-E1E3-C5B1-8872-D58D285CD7C7}"/>
-          </ac:picMkLst>
-        </pc:picChg>
-        <pc:picChg chg="add del mod">
-          <ac:chgData name="musukie52@gmail.com" userId="017bd91f96aa8751" providerId="LiveId" clId="{5B2C3894-F97E-4CAB-8812-5BB4D83AAC6A}" dt="2026-02-07T06:21:15.817" v="133" actId="478"/>
-          <ac:picMkLst>
-            <pc:docMk/>
-            <pc:sldMk cId="2637264580" sldId="285"/>
-            <ac:picMk id="35" creationId="{CB5D1FF0-E167-9DC0-96AF-65C009F6A4B1}"/>
           </ac:picMkLst>
         </pc:picChg>
         <pc:picChg chg="add mod">
@@ -1194,13 +842,6 @@
             <ac:picMk id="46" creationId="{46C6452A-5CFC-F71B-7FFD-5CEDA0D6619F}"/>
           </ac:picMkLst>
         </pc:picChg>
-      </pc:sldChg>
-      <pc:sldChg chg="add del">
-        <pc:chgData name="musukie52@gmail.com" userId="017bd91f96aa8751" providerId="LiveId" clId="{5B2C3894-F97E-4CAB-8812-5BB4D83AAC6A}" dt="2026-02-07T06:13:07.886" v="25"/>
-        <pc:sldMkLst>
-          <pc:docMk/>
-          <pc:sldMk cId="3743616522" sldId="286"/>
-        </pc:sldMkLst>
       </pc:sldChg>
     </pc:docChg>
   </pc:docChgLst>
@@ -6439,6 +6080,13 @@
             <a:prstDash val="solid"/>
           </a:ln>
         </p:spPr>
+        <p:txBody>
+          <a:bodyPr/>
+          <a:lstStyle/>
+          <a:p>
+            <a:endParaRPr lang="ko-KR" altLang="en-US"/>
+          </a:p>
+        </p:txBody>
       </p:sp>
       <p:sp>
         <p:nvSpPr>
